--- a/Introduccion a la Ingenieria/Clases/Clase 13 - Evaluacion de impacto social y ambiental/Presentacion.pptx
+++ b/Introduccion a la Ingenieria/Clases/Clase 13 - Evaluacion de impacto social y ambiental/Presentacion.pptx
@@ -6555,7 +6555,7 @@
               </a:spcAft>
             </a:pPr>
             <a:r>
-              <a:rPr sz="1600" b="0" i="0">
+              <a:rPr sz="2000" b="0" i="0">
                 <a:solidFill>
                   <a:srgbClr val="333333"/>
                 </a:solidFill>
@@ -6564,7 +6564,7 @@
               <a:t>–   </a:t>
             </a:r>
             <a:r>
-              <a:rPr sz="1600" b="1" i="0">
+              <a:rPr sz="2000" b="1" i="0">
                 <a:solidFill>
                   <a:srgbClr val="333333"/>
                 </a:solidFill>
@@ -6573,7 +6573,7 @@
               <a:t>Trabajo dirigido:</a:t>
             </a:r>
             <a:r>
-              <a:rPr sz="1600" b="0" i="0">
+              <a:rPr sz="2000" b="0" i="0">
                 <a:solidFill>
                   <a:srgbClr val="333333"/>
                 </a:solidFill>
@@ -6589,7 +6589,7 @@
               </a:spcAft>
             </a:pPr>
             <a:r>
-              <a:rPr sz="1600" b="0" i="0">
+              <a:rPr sz="2000" b="0" i="0">
                 <a:solidFill>
                   <a:srgbClr val="333333"/>
                 </a:solidFill>
@@ -6598,7 +6598,7 @@
               <a:t>–   </a:t>
             </a:r>
             <a:r>
-              <a:rPr sz="1600" b="1" i="0">
+              <a:rPr sz="2000" b="1" i="0">
                 <a:solidFill>
                   <a:srgbClr val="333333"/>
                 </a:solidFill>
@@ -6607,7 +6607,7 @@
               <a:t>Trabajo independiente:</a:t>
             </a:r>
             <a:r>
-              <a:rPr sz="1600" b="0" i="0">
+              <a:rPr sz="2000" b="0" i="0">
                 <a:solidFill>
                   <a:srgbClr val="333333"/>
                 </a:solidFill>
@@ -6616,7 +6616,7 @@
               <a:t> Informe de evaluación del impacto: media página que resuma </a:t>
             </a:r>
             <a:r>
-              <a:rPr sz="1600" b="1" i="0">
+              <a:rPr sz="2000" b="1" i="0">
                 <a:solidFill>
                   <a:srgbClr val="333333"/>
                 </a:solidFill>
@@ -6625,7 +6625,7 @@
               <a:t>el impacto positivo más fuerte con su número y el negativo más importante con su mitigación</a:t>
             </a:r>
             <a:r>
-              <a:rPr sz="1600" b="0" i="0">
+              <a:rPr sz="2000" b="0" i="0">
                 <a:solidFill>
                   <a:srgbClr val="333333"/>
                 </a:solidFill>
@@ -6641,7 +6641,7 @@
               </a:spcAft>
             </a:pPr>
             <a:r>
-              <a:rPr sz="1600" b="0" i="0">
+              <a:rPr sz="2000" b="0" i="0">
                 <a:solidFill>
                   <a:srgbClr val="333333"/>
                 </a:solidFill>
@@ -6650,7 +6650,7 @@
               <a:t>–   </a:t>
             </a:r>
             <a:r>
-              <a:rPr sz="1600" b="1" i="0">
+              <a:rPr sz="2000" b="1" i="0">
                 <a:solidFill>
                   <a:srgbClr val="333333"/>
                 </a:solidFill>
@@ -6659,7 +6659,7 @@
               <a:t>Sesión 14 · Preparación de la presentación final</a:t>
             </a:r>
             <a:r>
-              <a:rPr sz="1600" b="0" i="0">
+              <a:rPr sz="2000" b="0" i="0">
                 <a:solidFill>
                   <a:srgbClr val="333333"/>
                 </a:solidFill>
@@ -6668,7 +6668,7 @@
               <a:t> — preparamos la </a:t>
             </a:r>
             <a:r>
-              <a:rPr sz="1600" b="1" i="0">
+              <a:rPr sz="2000" b="1" i="0">
                 <a:solidFill>
                   <a:srgbClr val="333333"/>
                 </a:solidFill>
@@ -6677,7 +6677,7 @@
               <a:t>presentación final</a:t>
             </a:r>
             <a:r>
-              <a:rPr sz="1600" b="0" i="0">
+              <a:rPr sz="2000" b="0" i="0">
                 <a:solidFill>
                   <a:srgbClr val="333333"/>
                 </a:solidFill>
@@ -6686,7 +6686,7 @@
               <a:t>: la estructura de 8 minutos, las diapositivas, el reparto entre integrantes y el </a:t>
             </a:r>
             <a:r>
-              <a:rPr sz="1600" b="1" i="0">
+              <a:rPr sz="2000" b="1" i="0">
                 <a:solidFill>
                   <a:srgbClr val="333333"/>
                 </a:solidFill>
@@ -6695,7 +6695,7 @@
               <a:t>ensayo general cronometrado</a:t>
             </a:r>
             <a:r>
-              <a:rPr sz="1600" b="0" i="0">
+              <a:rPr sz="2000" b="0" i="0">
                 <a:solidFill>
                   <a:srgbClr val="333333"/>
                 </a:solidFill>
@@ -6711,7 +6711,7 @@
               </a:spcAft>
             </a:pPr>
             <a:r>
-              <a:rPr sz="1600" b="0" i="0">
+              <a:rPr sz="2000" b="0" i="0">
                 <a:solidFill>
                   <a:srgbClr val="333333"/>
                 </a:solidFill>
@@ -6720,7 +6720,7 @@
               <a:t>–   </a:t>
             </a:r>
             <a:r>
-              <a:rPr sz="1600" b="1" i="0">
+              <a:rPr sz="2000" b="1" i="0">
                 <a:solidFill>
                   <a:srgbClr val="333333"/>
                 </a:solidFill>
@@ -6729,7 +6729,7 @@
               <a:t>Aviso:</a:t>
             </a:r>
             <a:r>
-              <a:rPr sz="1600" b="0" i="0">
+              <a:rPr sz="2000" b="0" i="0">
                 <a:solidFill>
                   <a:srgbClr val="333333"/>
                 </a:solidFill>
@@ -6738,7 +6738,7 @@
               <a:t> Para la sesión 14 el </a:t>
             </a:r>
             <a:r>
-              <a:rPr sz="1600" b="1" i="0">
+              <a:rPr sz="2000" b="1" i="0">
                 <a:solidFill>
                   <a:srgbClr val="333333"/>
                 </a:solidFill>
@@ -6747,7 +6747,7 @@
               <a:t>prototipo tiene que estar ya ajustado</a:t>
             </a:r>
             <a:r>
-              <a:rPr sz="1600" b="0" i="0">
+              <a:rPr sz="2000" b="0" i="0">
                 <a:solidFill>
                   <a:srgbClr val="333333"/>
                 </a:solidFill>
@@ -6756,7 +6756,7 @@
               <a:t> con lo que salió de la sesión 12: si ensayan con la versión vieja, el ensayo no sirve. Traigan también la cuenta de Canva o Google Slides lista y </a:t>
             </a:r>
             <a:r>
-              <a:rPr sz="1600" b="1" i="0">
+              <a:rPr sz="2000" b="1" i="0">
                 <a:solidFill>
                   <a:srgbClr val="333333"/>
                 </a:solidFill>
@@ -6765,7 +6765,7 @@
               <a:t>quién va a hablar de qué</a:t>
             </a:r>
             <a:r>
-              <a:rPr sz="1600" b="0" i="0">
+              <a:rPr sz="2000" b="0" i="0">
                 <a:solidFill>
                   <a:srgbClr val="333333"/>
                 </a:solidFill>
@@ -6781,7 +6781,7 @@
               </a:spcAft>
             </a:pPr>
             <a:r>
-              <a:rPr sz="1600" b="0" i="0">
+              <a:rPr sz="2000" b="0" i="0">
                 <a:solidFill>
                   <a:srgbClr val="333333"/>
                 </a:solidFill>
@@ -6790,7 +6790,7 @@
               <a:t>–   </a:t>
             </a:r>
             <a:r>
-              <a:rPr sz="1600" b="1" i="0">
+              <a:rPr sz="2000" b="1" i="0">
                 <a:solidFill>
                   <a:srgbClr val="333333"/>
                 </a:solidFill>
@@ -6799,7 +6799,7 @@
               <a:t>Antes de salir:</a:t>
             </a:r>
             <a:r>
-              <a:rPr sz="1600" b="0" i="0">
+              <a:rPr sz="2000" b="0" i="0">
                 <a:solidFill>
                   <a:srgbClr val="333333"/>
                 </a:solidFill>
@@ -7373,7 +7373,7 @@
         <p:spPr>
           <a:xfrm>
             <a:off x="502920" y="2798064"/>
-            <a:ext cx="2164019" cy="2560320"/>
+            <a:ext cx="2164019" cy="3099816"/>
           </a:xfrm>
           <a:prstGeom prst="rect">
             <a:avLst/>
@@ -7488,7 +7488,7 @@
         <p:spPr>
           <a:xfrm>
             <a:off x="2758379" y="2798064"/>
-            <a:ext cx="2164019" cy="2560320"/>
+            <a:ext cx="2164019" cy="3099816"/>
           </a:xfrm>
           <a:prstGeom prst="rect">
             <a:avLst/>
@@ -7603,7 +7603,7 @@
         <p:spPr>
           <a:xfrm>
             <a:off x="5013838" y="2798064"/>
-            <a:ext cx="2164019" cy="2560320"/>
+            <a:ext cx="2164019" cy="3099816"/>
           </a:xfrm>
           <a:prstGeom prst="rect">
             <a:avLst/>
@@ -7718,7 +7718,7 @@
         <p:spPr>
           <a:xfrm>
             <a:off x="7269297" y="2798064"/>
-            <a:ext cx="2164019" cy="2560320"/>
+            <a:ext cx="2164019" cy="3099816"/>
           </a:xfrm>
           <a:prstGeom prst="rect">
             <a:avLst/>
@@ -7833,7 +7833,7 @@
         <p:spPr>
           <a:xfrm>
             <a:off x="9524756" y="2798064"/>
-            <a:ext cx="2164019" cy="2560320"/>
+            <a:ext cx="2164019" cy="3099816"/>
           </a:xfrm>
           <a:prstGeom prst="rect">
             <a:avLst/>
@@ -7867,8 +7867,8 @@
         </p:nvSpPr>
         <p:spPr>
           <a:xfrm>
-            <a:off x="457200" y="5943600"/>
-            <a:ext cx="11277295" cy="365760"/>
+            <a:off x="457200" y="5806440"/>
+            <a:ext cx="11277295" cy="640080"/>
           </a:xfrm>
           <a:prstGeom prst="rect">
             <a:avLst/>
@@ -8121,7 +8121,7 @@
               </a:spcAft>
             </a:pPr>
             <a:r>
-              <a:rPr sz="1600" b="0" i="0">
+              <a:rPr sz="2000" b="0" i="0">
                 <a:solidFill>
                   <a:srgbClr val="333333"/>
                 </a:solidFill>
@@ -8130,7 +8130,7 @@
               <a:t>–   Distinguir </a:t>
             </a:r>
             <a:r>
-              <a:rPr sz="1600" b="1" i="0">
+              <a:rPr sz="2000" b="1" i="0">
                 <a:solidFill>
                   <a:srgbClr val="333333"/>
                 </a:solidFill>
@@ -8139,7 +8139,7 @@
               <a:t>impacto</a:t>
             </a:r>
             <a:r>
-              <a:rPr sz="1600" b="0" i="0">
+              <a:rPr sz="2000" b="0" i="0">
                 <a:solidFill>
                   <a:srgbClr val="333333"/>
                 </a:solidFill>
@@ -8148,7 +8148,7 @@
               <a:t> de intención, y </a:t>
             </a:r>
             <a:r>
-              <a:rPr sz="1600" b="1" i="0">
+              <a:rPr sz="2000" b="1" i="0">
                 <a:solidFill>
                   <a:srgbClr val="333333"/>
                 </a:solidFill>
@@ -8157,7 +8157,7 @@
               <a:t>directo</a:t>
             </a:r>
             <a:r>
-              <a:rPr sz="1600" b="0" i="0">
+              <a:rPr sz="2000" b="0" i="0">
                 <a:solidFill>
                   <a:srgbClr val="333333"/>
                 </a:solidFill>
@@ -8173,7 +8173,7 @@
               </a:spcAft>
             </a:pPr>
             <a:r>
-              <a:rPr sz="1600" b="0" i="0">
+              <a:rPr sz="2000" b="0" i="0">
                 <a:solidFill>
                   <a:srgbClr val="333333"/>
                 </a:solidFill>
@@ -8182,7 +8182,7 @@
               <a:t>–   Identificar a los afectados que </a:t>
             </a:r>
             <a:r>
-              <a:rPr sz="1600" b="1" i="0">
+              <a:rPr sz="2000" b="1" i="0">
                 <a:solidFill>
                   <a:srgbClr val="333333"/>
                 </a:solidFill>
@@ -8191,7 +8191,7 @@
               <a:t>no son usuarios</a:t>
             </a:r>
             <a:r>
-              <a:rPr sz="1600" b="0" i="0">
+              <a:rPr sz="2000" b="0" i="0">
                 <a:solidFill>
                   <a:srgbClr val="333333"/>
                 </a:solidFill>
@@ -8207,7 +8207,7 @@
               </a:spcAft>
             </a:pPr>
             <a:r>
-              <a:rPr sz="1600" b="0" i="0">
+              <a:rPr sz="2000" b="0" i="0">
                 <a:solidFill>
                   <a:srgbClr val="333333"/>
                 </a:solidFill>
@@ -8216,7 +8216,7 @@
               <a:t>–   Llenar una </a:t>
             </a:r>
             <a:r>
-              <a:rPr sz="1600" b="1" i="0">
+              <a:rPr sz="2000" b="1" i="0">
                 <a:solidFill>
                   <a:srgbClr val="333333"/>
                 </a:solidFill>
@@ -8225,7 +8225,7 @@
               <a:t>matriz de impacto</a:t>
             </a:r>
             <a:r>
-              <a:rPr sz="1600" b="0" i="0">
+              <a:rPr sz="2000" b="0" i="0">
                 <a:solidFill>
                   <a:srgbClr val="333333"/>
                 </a:solidFill>
@@ -8241,7 +8241,7 @@
               </a:spcAft>
             </a:pPr>
             <a:r>
-              <a:rPr sz="1600" b="0" i="0">
+              <a:rPr sz="2000" b="0" i="0">
                 <a:solidFill>
                   <a:srgbClr val="333333"/>
                 </a:solidFill>
@@ -8250,7 +8250,7 @@
               <a:t>–   Declarar los impactos </a:t>
             </a:r>
             <a:r>
-              <a:rPr sz="1600" b="1" i="0">
+              <a:rPr sz="2000" b="1" i="0">
                 <a:solidFill>
                   <a:srgbClr val="333333"/>
                 </a:solidFill>
@@ -8259,7 +8259,7 @@
               <a:t>negativos</a:t>
             </a:r>
             <a:r>
-              <a:rPr sz="1600" b="0" i="0">
+              <a:rPr sz="2000" b="0" i="0">
                 <a:solidFill>
                   <a:srgbClr val="333333"/>
                 </a:solidFill>
@@ -8268,7 +8268,7 @@
               <a:t> y proponer </a:t>
             </a:r>
             <a:r>
-              <a:rPr sz="1600" b="1" i="0">
+              <a:rPr sz="2000" b="1" i="0">
                 <a:solidFill>
                   <a:srgbClr val="333333"/>
                 </a:solidFill>
@@ -8277,7 +8277,7 @@
               <a:t>medidas de mitigación</a:t>
             </a:r>
             <a:r>
-              <a:rPr sz="1600" b="0" i="0">
+              <a:rPr sz="2000" b="0" i="0">
                 <a:solidFill>
                   <a:srgbClr val="333333"/>
                 </a:solidFill>
@@ -12351,7 +12351,7 @@
               </a:spcAft>
             </a:pPr>
             <a:r>
-              <a:rPr sz="1300" b="0" i="0">
+              <a:rPr sz="1500" b="0" i="0">
                 <a:solidFill>
                   <a:srgbClr val="333333"/>
                 </a:solidFill>
@@ -12367,7 +12367,7 @@
               </a:spcAft>
             </a:pPr>
             <a:r>
-              <a:rPr sz="1300" b="0" i="0">
+              <a:rPr sz="1500" b="0" i="0">
                 <a:solidFill>
                   <a:srgbClr val="333333"/>
                 </a:solidFill>
@@ -12383,7 +12383,7 @@
               </a:spcAft>
             </a:pPr>
             <a:r>
-              <a:rPr sz="1300" b="0" i="0">
+              <a:rPr sz="1500" b="0" i="0">
                 <a:solidFill>
                   <a:srgbClr val="333333"/>
                 </a:solidFill>
@@ -12399,7 +12399,7 @@
               </a:spcAft>
             </a:pPr>
             <a:r>
-              <a:rPr sz="1300" b="0" i="0">
+              <a:rPr sz="1500" b="0" i="0">
                 <a:solidFill>
                   <a:srgbClr val="333333"/>
                 </a:solidFill>
@@ -12415,7 +12415,7 @@
               </a:spcAft>
             </a:pPr>
             <a:r>
-              <a:rPr sz="1300" b="0" i="0">
+              <a:rPr sz="1500" b="0" i="0">
                 <a:solidFill>
                   <a:srgbClr val="333333"/>
                 </a:solidFill>
@@ -12575,7 +12575,7 @@
               </a:spcAft>
             </a:pPr>
             <a:r>
-              <a:rPr sz="1300" b="0" i="0">
+              <a:rPr sz="1500" b="0" i="0">
                 <a:solidFill>
                   <a:srgbClr val="333333"/>
                 </a:solidFill>
@@ -12584,7 +12584,7 @@
               <a:t>–   «Evita </a:t>
             </a:r>
             <a:r>
-              <a:rPr sz="1300" b="1" i="0">
+              <a:rPr sz="1500" b="1" i="0">
                 <a:solidFill>
                   <a:srgbClr val="333333"/>
                 </a:solidFill>
@@ -12593,7 +12593,7 @@
               <a:t>4 de cada 10 viajes</a:t>
             </a:r>
             <a:r>
-              <a:rPr sz="1300" b="0" i="0">
+              <a:rPr sz="1500" b="0" i="0">
                 <a:solidFill>
                   <a:srgbClr val="333333"/>
                 </a:solidFill>
@@ -12609,7 +12609,7 @@
               </a:spcAft>
             </a:pPr>
             <a:r>
-              <a:rPr sz="1300" b="0" i="0">
+              <a:rPr sz="1500" b="0" i="0">
                 <a:solidFill>
                   <a:srgbClr val="333333"/>
                 </a:solidFill>
@@ -12618,7 +12618,7 @@
               <a:t>–   «Cada consulta mueve </a:t>
             </a:r>
             <a:r>
-              <a:rPr sz="1300" b="1" i="0">
+              <a:rPr sz="1500" b="1" i="0">
                 <a:solidFill>
                   <a:srgbClr val="333333"/>
                 </a:solidFill>
@@ -12627,7 +12627,7 @@
               <a:t>menos de 200 KB</a:t>
             </a:r>
             <a:r>
-              <a:rPr sz="1300" b="0" i="0">
+              <a:rPr sz="1500" b="0" i="0">
                 <a:solidFill>
                   <a:srgbClr val="333333"/>
                 </a:solidFill>
@@ -12643,7 +12643,7 @@
               </a:spcAft>
             </a:pPr>
             <a:r>
-              <a:rPr sz="1300" b="0" i="0">
+              <a:rPr sz="1500" b="0" i="0">
                 <a:solidFill>
                   <a:srgbClr val="333333"/>
                 </a:solidFill>
@@ -12652,7 +12652,7 @@
               <a:t>–   «Ahorra al usuario </a:t>
             </a:r>
             <a:r>
-              <a:rPr sz="1300" b="1" i="0">
+              <a:rPr sz="1500" b="1" i="0">
                 <a:solidFill>
                   <a:srgbClr val="333333"/>
                 </a:solidFill>
@@ -12661,7 +12661,7 @@
               <a:t>un pasaje</a:t>
             </a:r>
             <a:r>
-              <a:rPr sz="1300" b="0" i="0">
+              <a:rPr sz="1500" b="0" i="0">
                 <a:solidFill>
                   <a:srgbClr val="333333"/>
                 </a:solidFill>
@@ -12677,7 +12677,7 @@
               </a:spcAft>
             </a:pPr>
             <a:r>
-              <a:rPr sz="1300" b="0" i="0">
+              <a:rPr sz="1500" b="0" i="0">
                 <a:solidFill>
                   <a:srgbClr val="333333"/>
                 </a:solidFill>
@@ -12686,7 +12686,7 @@
               <a:t>–   «Alcanza a quien tiene celular con datos: </a:t>
             </a:r>
             <a:r>
-              <a:rPr sz="1300" b="1" i="0">
+              <a:rPr sz="1500" b="1" i="0">
                 <a:solidFill>
                   <a:srgbClr val="333333"/>
                 </a:solidFill>
@@ -12695,7 +12695,7 @@
               <a:t>queda fuera 1 de cada 5</a:t>
             </a:r>
             <a:r>
-              <a:rPr sz="1300" b="0" i="0">
+              <a:rPr sz="1500" b="0" i="0">
                 <a:solidFill>
                   <a:srgbClr val="333333"/>
                 </a:solidFill>
@@ -12711,7 +12711,7 @@
               </a:spcAft>
             </a:pPr>
             <a:r>
-              <a:rPr sz="1300" b="0" i="0">
+              <a:rPr sz="1500" b="0" i="0">
                 <a:solidFill>
                   <a:srgbClr val="333333"/>
                 </a:solidFill>
@@ -12720,7 +12720,7 @@
               <a:t>–   «Añade </a:t>
             </a:r>
             <a:r>
-              <a:rPr sz="1300" b="1" i="0">
+              <a:rPr sz="1500" b="1" i="0">
                 <a:solidFill>
                   <a:srgbClr val="333333"/>
                 </a:solidFill>
@@ -12729,7 +12729,7 @@
               <a:t>10 minutos diarios</a:t>
             </a:r>
             <a:r>
-              <a:rPr sz="1300" b="0" i="0">
+              <a:rPr sz="1500" b="0" i="0">
                 <a:solidFill>
                   <a:srgbClr val="333333"/>
                 </a:solidFill>

--- a/Introduccion a la Ingenieria/Clases/Clase 13 - Evaluacion de impacto social y ambiental/Presentacion.pptx
+++ b/Introduccion a la Ingenieria/Clases/Clase 13 - Evaluacion de impacto social y ambiental/Presentacion.pptx
@@ -6522,7 +6522,7 @@
                 </a:solidFill>
                 <a:latin typeface="Calibri"/>
               </a:rPr>
-              <a:t>Para la sesión 14</a:t>
+              <a:t>Para la Clase 14</a:t>
             </a:r>
           </a:p>
         </p:txBody>
@@ -6656,7 +6656,7 @@
                 </a:solidFill>
                 <a:latin typeface="Calibri"/>
               </a:rPr>
-              <a:t>Sesión 14 · Preparación de la presentación final</a:t>
+              <a:t>Clase 14 · Preparación de la presentación final</a:t>
             </a:r>
             <a:r>
               <a:rPr sz="2000" b="0" i="0">
@@ -6735,7 +6735,7 @@
                 </a:solidFill>
                 <a:latin typeface="Calibri"/>
               </a:rPr>
-              <a:t> Para la sesión 14 el </a:t>
+              <a:t> Para la Clase 14 el </a:t>
             </a:r>
             <a:r>
               <a:rPr sz="2000" b="1" i="0">
@@ -6753,7 +6753,7 @@
                 </a:solidFill>
                 <a:latin typeface="Calibri"/>
               </a:rPr>
-              <a:t> con lo que salió de la sesión 12: si ensayan con la versión vieja, el ensayo no sirve. Traigan también la cuenta de Canva o Google Slides lista y </a:t>
+              <a:t> con lo que salió de la Clase 12: si ensayan con la versión vieja, el ensayo no sirve. Traigan también la cuenta de Canva o Google Slides lista y </a:t>
             </a:r>
             <a:r>
               <a:rPr sz="2000" b="1" i="0">
@@ -6966,7 +6966,7 @@
                 </a:solidFill>
                 <a:latin typeface="Calibri"/>
               </a:rPr>
-              <a:t>Nos vemos en la sesión 14</a:t>
+              <a:t>Nos vemos en la Clase 14</a:t>
             </a:r>
           </a:p>
         </p:txBody>
@@ -7854,7 +7854,7 @@
                 </a:solidFill>
                 <a:latin typeface="Calibri"/>
               </a:rPr>
-              <a:t>Lo que queda amarrado para la sesión 14</a:t>
+              <a:t>Lo que queda amarrado para la Clase 14</a:t>
             </a:r>
           </a:p>
         </p:txBody>
